--- a/API & REST API.pptx
+++ b/API & REST API.pptx
@@ -5,7 +5,7 @@
     <p:sldMasterId id="2147483710" r:id="rId1"/>
   </p:sldMasterIdLst>
   <p:notesMasterIdLst>
-    <p:notesMasterId r:id="rId60"/>
+    <p:notesMasterId r:id="rId61"/>
   </p:notesMasterIdLst>
   <p:sldIdLst>
     <p:sldId id="447" r:id="rId2"/>
@@ -34,38 +34,39 @@
     <p:sldId id="372" r:id="rId25"/>
     <p:sldId id="379" r:id="rId26"/>
     <p:sldId id="385" r:id="rId27"/>
-    <p:sldId id="446" r:id="rId28"/>
-    <p:sldId id="532" r:id="rId29"/>
-    <p:sldId id="463" r:id="rId30"/>
-    <p:sldId id="464" r:id="rId31"/>
-    <p:sldId id="465" r:id="rId32"/>
-    <p:sldId id="466" r:id="rId33"/>
-    <p:sldId id="491" r:id="rId34"/>
-    <p:sldId id="494" r:id="rId35"/>
-    <p:sldId id="544" r:id="rId36"/>
-    <p:sldId id="545" r:id="rId37"/>
-    <p:sldId id="546" r:id="rId38"/>
-    <p:sldId id="502" r:id="rId39"/>
-    <p:sldId id="503" r:id="rId40"/>
-    <p:sldId id="504" r:id="rId41"/>
-    <p:sldId id="505" r:id="rId42"/>
-    <p:sldId id="501" r:id="rId43"/>
-    <p:sldId id="533" r:id="rId44"/>
-    <p:sldId id="547" r:id="rId45"/>
-    <p:sldId id="508" r:id="rId46"/>
-    <p:sldId id="509" r:id="rId47"/>
-    <p:sldId id="511" r:id="rId48"/>
-    <p:sldId id="512" r:id="rId49"/>
-    <p:sldId id="513" r:id="rId50"/>
-    <p:sldId id="510" r:id="rId51"/>
-    <p:sldId id="514" r:id="rId52"/>
-    <p:sldId id="515" r:id="rId53"/>
-    <p:sldId id="516" r:id="rId54"/>
-    <p:sldId id="517" r:id="rId55"/>
-    <p:sldId id="336" r:id="rId56"/>
-    <p:sldId id="339" r:id="rId57"/>
-    <p:sldId id="340" r:id="rId58"/>
-    <p:sldId id="526" r:id="rId59"/>
+    <p:sldId id="550" r:id="rId28"/>
+    <p:sldId id="446" r:id="rId29"/>
+    <p:sldId id="532" r:id="rId30"/>
+    <p:sldId id="463" r:id="rId31"/>
+    <p:sldId id="464" r:id="rId32"/>
+    <p:sldId id="465" r:id="rId33"/>
+    <p:sldId id="466" r:id="rId34"/>
+    <p:sldId id="491" r:id="rId35"/>
+    <p:sldId id="494" r:id="rId36"/>
+    <p:sldId id="544" r:id="rId37"/>
+    <p:sldId id="545" r:id="rId38"/>
+    <p:sldId id="546" r:id="rId39"/>
+    <p:sldId id="502" r:id="rId40"/>
+    <p:sldId id="503" r:id="rId41"/>
+    <p:sldId id="504" r:id="rId42"/>
+    <p:sldId id="505" r:id="rId43"/>
+    <p:sldId id="501" r:id="rId44"/>
+    <p:sldId id="533" r:id="rId45"/>
+    <p:sldId id="547" r:id="rId46"/>
+    <p:sldId id="508" r:id="rId47"/>
+    <p:sldId id="509" r:id="rId48"/>
+    <p:sldId id="511" r:id="rId49"/>
+    <p:sldId id="512" r:id="rId50"/>
+    <p:sldId id="513" r:id="rId51"/>
+    <p:sldId id="510" r:id="rId52"/>
+    <p:sldId id="514" r:id="rId53"/>
+    <p:sldId id="515" r:id="rId54"/>
+    <p:sldId id="516" r:id="rId55"/>
+    <p:sldId id="517" r:id="rId56"/>
+    <p:sldId id="336" r:id="rId57"/>
+    <p:sldId id="339" r:id="rId58"/>
+    <p:sldId id="340" r:id="rId59"/>
+    <p:sldId id="526" r:id="rId60"/>
   </p:sldIdLst>
   <p:sldSz cx="12192000" cy="6858000"/>
   <p:notesSz cx="6858000" cy="9144000"/>
@@ -183,97 +184,9 @@
 <file path=ppt/changesInfos/changesInfo1.xml><?xml version="1.0" encoding="utf-8"?>
 <pc:chgInfo xmlns:a="http://schemas.openxmlformats.org/drawingml/2006/main" xmlns:r="http://schemas.openxmlformats.org/officeDocument/2006/relationships" xmlns:ac="http://schemas.microsoft.com/office/drawing/2013/main/command" xmlns:pc="http://schemas.microsoft.com/office/powerpoint/2013/main/command">
   <pc:docChgLst>
-    <pc:chgData name="Pramod Naik" userId="ceb6df04-ef15-4d9b-a141-998a03559d75" providerId="ADAL" clId="{D1D4E302-CA95-476B-B320-79C7EBDE6899}"/>
-    <pc:docChg chg="undo custSel addSld delSld modSld">
-      <pc:chgData name="Pramod Naik" userId="ceb6df04-ef15-4d9b-a141-998a03559d75" providerId="ADAL" clId="{D1D4E302-CA95-476B-B320-79C7EBDE6899}" dt="2025-09-04T20:26:20.323" v="8" actId="47"/>
-      <pc:docMkLst>
-        <pc:docMk/>
-      </pc:docMkLst>
-      <pc:sldChg chg="modSp">
-        <pc:chgData name="Pramod Naik" userId="ceb6df04-ef15-4d9b-a141-998a03559d75" providerId="ADAL" clId="{D1D4E302-CA95-476B-B320-79C7EBDE6899}" dt="2025-09-04T20:26:07.698" v="4" actId="1036"/>
-        <pc:sldMkLst>
-          <pc:docMk/>
-          <pc:sldMk cId="3886295808" sldId="538"/>
-        </pc:sldMkLst>
-      </pc:sldChg>
-      <pc:sldChg chg="del">
-        <pc:chgData name="Pramod Naik" userId="ceb6df04-ef15-4d9b-a141-998a03559d75" providerId="ADAL" clId="{D1D4E302-CA95-476B-B320-79C7EBDE6899}" dt="2025-09-04T20:26:19.563" v="7" actId="47"/>
-        <pc:sldMkLst>
-          <pc:docMk/>
-          <pc:sldMk cId="2303070927" sldId="539"/>
-        </pc:sldMkLst>
-      </pc:sldChg>
-      <pc:sldChg chg="add del">
-        <pc:chgData name="Pramod Naik" userId="ceb6df04-ef15-4d9b-a141-998a03559d75" providerId="ADAL" clId="{D1D4E302-CA95-476B-B320-79C7EBDE6899}" dt="2025-09-04T20:26:20.323" v="8" actId="47"/>
-        <pc:sldMkLst>
-          <pc:docMk/>
-          <pc:sldMk cId="2173694948" sldId="540"/>
-        </pc:sldMkLst>
-      </pc:sldChg>
-    </pc:docChg>
-  </pc:docChgLst>
-  <pc:docChgLst>
-    <pc:chgData name="Pramod Naik" userId="ceb6df04-ef15-4d9b-a141-998a03559d75" providerId="ADAL" clId="{2BBA8E63-1F83-4096-B685-F0D4199669C1}"/>
-    <pc:docChg chg="undo custSel addSld delSld modSld sldOrd">
-      <pc:chgData name="Pramod Naik" userId="ceb6df04-ef15-4d9b-a141-998a03559d75" providerId="ADAL" clId="{2BBA8E63-1F83-4096-B685-F0D4199669C1}" dt="2025-06-27T12:11:23.952" v="56" actId="1076"/>
-      <pc:docMkLst>
-        <pc:docMk/>
-      </pc:docMkLst>
-      <pc:sldChg chg="addSp delSp modSp mod">
-        <pc:chgData name="Pramod Naik" userId="ceb6df04-ef15-4d9b-a141-998a03559d75" providerId="ADAL" clId="{2BBA8E63-1F83-4096-B685-F0D4199669C1}" dt="2025-06-27T12:08:58.224" v="15" actId="1076"/>
-        <pc:sldMkLst>
-          <pc:docMk/>
-          <pc:sldMk cId="2805087750" sldId="369"/>
-        </pc:sldMkLst>
-      </pc:sldChg>
-      <pc:sldChg chg="add">
-        <pc:chgData name="Pramod Naik" userId="ceb6df04-ef15-4d9b-a141-998a03559d75" providerId="ADAL" clId="{2BBA8E63-1F83-4096-B685-F0D4199669C1}" dt="2025-06-27T12:07:21.871" v="0"/>
-        <pc:sldMkLst>
-          <pc:docMk/>
-          <pc:sldMk cId="1961164702" sldId="536"/>
-        </pc:sldMkLst>
-      </pc:sldChg>
-      <pc:sldChg chg="addSp delSp modSp add mod setBg">
-        <pc:chgData name="Pramod Naik" userId="ceb6df04-ef15-4d9b-a141-998a03559d75" providerId="ADAL" clId="{2BBA8E63-1F83-4096-B685-F0D4199669C1}" dt="2025-06-27T12:11:23.952" v="56" actId="1076"/>
-        <pc:sldMkLst>
-          <pc:docMk/>
-          <pc:sldMk cId="2190670439" sldId="537"/>
-        </pc:sldMkLst>
-      </pc:sldChg>
-      <pc:sldChg chg="addSp delSp modSp add mod ord">
-        <pc:chgData name="Pramod Naik" userId="ceb6df04-ef15-4d9b-a141-998a03559d75" providerId="ADAL" clId="{2BBA8E63-1F83-4096-B685-F0D4199669C1}" dt="2025-06-27T12:10:16.046" v="40"/>
-        <pc:sldMkLst>
-          <pc:docMk/>
-          <pc:sldMk cId="3886295808" sldId="538"/>
-        </pc:sldMkLst>
-      </pc:sldChg>
-      <pc:sldChg chg="add">
-        <pc:chgData name="Pramod Naik" userId="ceb6df04-ef15-4d9b-a141-998a03559d75" providerId="ADAL" clId="{2BBA8E63-1F83-4096-B685-F0D4199669C1}" dt="2025-06-27T12:10:18.134" v="41"/>
-        <pc:sldMkLst>
-          <pc:docMk/>
-          <pc:sldMk cId="2303070927" sldId="539"/>
-        </pc:sldMkLst>
-      </pc:sldChg>
-      <pc:sldChg chg="add del">
-        <pc:chgData name="Pramod Naik" userId="ceb6df04-ef15-4d9b-a141-998a03559d75" providerId="ADAL" clId="{2BBA8E63-1F83-4096-B685-F0D4199669C1}" dt="2025-06-27T12:09:53.990" v="35"/>
-        <pc:sldMkLst>
-          <pc:docMk/>
-          <pc:sldMk cId="4238638134" sldId="539"/>
-        </pc:sldMkLst>
-      </pc:sldChg>
-      <pc:sldChg chg="add">
-        <pc:chgData name="Pramod Naik" userId="ceb6df04-ef15-4d9b-a141-998a03559d75" providerId="ADAL" clId="{2BBA8E63-1F83-4096-B685-F0D4199669C1}" dt="2025-06-27T12:10:18.332" v="42"/>
-        <pc:sldMkLst>
-          <pc:docMk/>
-          <pc:sldMk cId="2173694948" sldId="540"/>
-        </pc:sldMkLst>
-      </pc:sldChg>
-    </pc:docChg>
-  </pc:docChgLst>
-  <pc:docChgLst>
     <pc:chgData name="Pramod Naik" userId="ceb6df04-ef15-4d9b-a141-998a03559d75" providerId="ADAL" clId="{62E9B5AE-779D-4001-92D3-8FF830A8A9C1}"/>
     <pc:docChg chg="undo custSel addSld delSld modSld">
-      <pc:chgData name="Pramod Naik" userId="ceb6df04-ef15-4d9b-a141-998a03559d75" providerId="ADAL" clId="{62E9B5AE-779D-4001-92D3-8FF830A8A9C1}" dt="2025-10-10T07:16:09.188" v="474" actId="20577"/>
+      <pc:chgData name="Pramod Naik" userId="ceb6df04-ef15-4d9b-a141-998a03559d75" providerId="ADAL" clId="{62E9B5AE-779D-4001-92D3-8FF830A8A9C1}" dt="2025-10-16T06:10:59.039" v="497" actId="14100"/>
       <pc:docMkLst>
         <pc:docMk/>
       </pc:docMkLst>
@@ -1071,14 +984,6 @@
           <pc:docMk/>
           <pc:sldMk cId="3900606193" sldId="544"/>
         </pc:sldMkLst>
-        <pc:spChg chg="del">
-          <ac:chgData name="Pramod Naik" userId="ceb6df04-ef15-4d9b-a141-998a03559d75" providerId="ADAL" clId="{62E9B5AE-779D-4001-92D3-8FF830A8A9C1}" dt="2025-10-09T19:33:51.570" v="297" actId="478"/>
-          <ac:spMkLst>
-            <pc:docMk/>
-            <pc:sldMk cId="3900606193" sldId="544"/>
-            <ac:spMk id="2" creationId="{1EDD05CA-D2CA-377D-B9A0-CB2719222A83}"/>
-          </ac:spMkLst>
-        </pc:spChg>
         <pc:spChg chg="mod">
           <ac:chgData name="Pramod Naik" userId="ceb6df04-ef15-4d9b-a141-998a03559d75" providerId="ADAL" clId="{62E9B5AE-779D-4001-92D3-8FF830A8A9C1}" dt="2025-10-09T19:34:28.822" v="323" actId="403"/>
           <ac:spMkLst>
@@ -1094,14 +999,6 @@
           <pc:docMk/>
           <pc:sldMk cId="1280191467" sldId="545"/>
         </pc:sldMkLst>
-        <pc:spChg chg="del">
-          <ac:chgData name="Pramod Naik" userId="ceb6df04-ef15-4d9b-a141-998a03559d75" providerId="ADAL" clId="{62E9B5AE-779D-4001-92D3-8FF830A8A9C1}" dt="2025-10-09T19:35:24.085" v="325" actId="478"/>
-          <ac:spMkLst>
-            <pc:docMk/>
-            <pc:sldMk cId="1280191467" sldId="545"/>
-            <ac:spMk id="2" creationId="{7E917759-6C2A-CBE7-1E09-D58D32F96ED5}"/>
-          </ac:spMkLst>
-        </pc:spChg>
         <pc:spChg chg="mod">
           <ac:chgData name="Pramod Naik" userId="ceb6df04-ef15-4d9b-a141-998a03559d75" providerId="ADAL" clId="{62E9B5AE-779D-4001-92D3-8FF830A8A9C1}" dt="2025-10-09T19:36:05.739" v="342" actId="113"/>
           <ac:spMkLst>
@@ -1139,38 +1036,6 @@
           <pc:docMk/>
           <pc:sldMk cId="1110909040" sldId="548"/>
         </pc:sldMkLst>
-        <pc:spChg chg="del">
-          <ac:chgData name="Pramod Naik" userId="ceb6df04-ef15-4d9b-a141-998a03559d75" providerId="ADAL" clId="{62E9B5AE-779D-4001-92D3-8FF830A8A9C1}" dt="2025-10-10T07:02:07.216" v="452" actId="478"/>
-          <ac:spMkLst>
-            <pc:docMk/>
-            <pc:sldMk cId="1110909040" sldId="548"/>
-            <ac:spMk id="2" creationId="{FB621F07-21AE-9840-AFF4-80336735EEC4}"/>
-          </ac:spMkLst>
-        </pc:spChg>
-        <pc:spChg chg="add del mod">
-          <ac:chgData name="Pramod Naik" userId="ceb6df04-ef15-4d9b-a141-998a03559d75" providerId="ADAL" clId="{62E9B5AE-779D-4001-92D3-8FF830A8A9C1}" dt="2025-10-10T07:02:31.668" v="461" actId="478"/>
-          <ac:spMkLst>
-            <pc:docMk/>
-            <pc:sldMk cId="1110909040" sldId="548"/>
-            <ac:spMk id="3" creationId="{2AA7382E-8119-A790-A331-D823F45FE620}"/>
-          </ac:spMkLst>
-        </pc:spChg>
-        <pc:picChg chg="add mod">
-          <ac:chgData name="Pramod Naik" userId="ceb6df04-ef15-4d9b-a141-998a03559d75" providerId="ADAL" clId="{62E9B5AE-779D-4001-92D3-8FF830A8A9C1}" dt="2025-10-10T07:02:29.148" v="460"/>
-          <ac:picMkLst>
-            <pc:docMk/>
-            <pc:sldMk cId="1110909040" sldId="548"/>
-            <ac:picMk id="1026" creationId="{17808662-891D-EF98-15EC-9B06B9AE00EB}"/>
-          </ac:picMkLst>
-        </pc:picChg>
-        <pc:picChg chg="add del mod">
-          <ac:chgData name="Pramod Naik" userId="ceb6df04-ef15-4d9b-a141-998a03559d75" providerId="ADAL" clId="{62E9B5AE-779D-4001-92D3-8FF830A8A9C1}" dt="2025-10-10T07:03:38.120" v="467" actId="478"/>
-          <ac:picMkLst>
-            <pc:docMk/>
-            <pc:sldMk cId="1110909040" sldId="548"/>
-            <ac:picMk id="1028" creationId="{BC52F715-64B7-547C-7457-53257E4181EF}"/>
-          </ac:picMkLst>
-        </pc:picChg>
         <pc:picChg chg="add">
           <ac:chgData name="Pramod Naik" userId="ceb6df04-ef15-4d9b-a141-998a03559d75" providerId="ADAL" clId="{62E9B5AE-779D-4001-92D3-8FF830A8A9C1}" dt="2025-10-10T07:03:40.917" v="468"/>
           <ac:picMkLst>
@@ -1179,6 +1044,117 @@
             <ac:picMk id="1030" creationId="{243886C6-4738-5198-8FA3-91D62FB558F6}"/>
           </ac:picMkLst>
         </pc:picChg>
+      </pc:sldChg>
+      <pc:sldChg chg="delSp modSp new mod">
+        <pc:chgData name="Pramod Naik" userId="ceb6df04-ef15-4d9b-a141-998a03559d75" providerId="ADAL" clId="{62E9B5AE-779D-4001-92D3-8FF830A8A9C1}" dt="2025-10-16T06:10:59.039" v="497" actId="14100"/>
+        <pc:sldMkLst>
+          <pc:docMk/>
+          <pc:sldMk cId="3323179440" sldId="550"/>
+        </pc:sldMkLst>
+        <pc:spChg chg="del">
+          <ac:chgData name="Pramod Naik" userId="ceb6df04-ef15-4d9b-a141-998a03559d75" providerId="ADAL" clId="{62E9B5AE-779D-4001-92D3-8FF830A8A9C1}" dt="2025-10-16T06:10:47.517" v="476" actId="478"/>
+          <ac:spMkLst>
+            <pc:docMk/>
+            <pc:sldMk cId="3323179440" sldId="550"/>
+            <ac:spMk id="2" creationId="{85CF0855-B468-FD92-7C1D-5932BB1549FC}"/>
+          </ac:spMkLst>
+        </pc:spChg>
+        <pc:spChg chg="mod">
+          <ac:chgData name="Pramod Naik" userId="ceb6df04-ef15-4d9b-a141-998a03559d75" providerId="ADAL" clId="{62E9B5AE-779D-4001-92D3-8FF830A8A9C1}" dt="2025-10-16T06:10:59.039" v="497" actId="14100"/>
+          <ac:spMkLst>
+            <pc:docMk/>
+            <pc:sldMk cId="3323179440" sldId="550"/>
+            <ac:spMk id="3" creationId="{A7AA8225-E560-3C4E-153E-A108BFE096E7}"/>
+          </ac:spMkLst>
+        </pc:spChg>
+      </pc:sldChg>
+    </pc:docChg>
+  </pc:docChgLst>
+  <pc:docChgLst>
+    <pc:chgData name="Pramod Naik" userId="ceb6df04-ef15-4d9b-a141-998a03559d75" providerId="ADAL" clId="{2BBA8E63-1F83-4096-B685-F0D4199669C1}"/>
+    <pc:docChg chg="undo custSel addSld delSld modSld sldOrd">
+      <pc:chgData name="Pramod Naik" userId="ceb6df04-ef15-4d9b-a141-998a03559d75" providerId="ADAL" clId="{2BBA8E63-1F83-4096-B685-F0D4199669C1}" dt="2025-06-27T12:11:23.952" v="56" actId="1076"/>
+      <pc:docMkLst>
+        <pc:docMk/>
+      </pc:docMkLst>
+      <pc:sldChg chg="addSp delSp modSp mod">
+        <pc:chgData name="Pramod Naik" userId="ceb6df04-ef15-4d9b-a141-998a03559d75" providerId="ADAL" clId="{2BBA8E63-1F83-4096-B685-F0D4199669C1}" dt="2025-06-27T12:08:58.224" v="15" actId="1076"/>
+        <pc:sldMkLst>
+          <pc:docMk/>
+          <pc:sldMk cId="2805087750" sldId="369"/>
+        </pc:sldMkLst>
+      </pc:sldChg>
+      <pc:sldChg chg="add">
+        <pc:chgData name="Pramod Naik" userId="ceb6df04-ef15-4d9b-a141-998a03559d75" providerId="ADAL" clId="{2BBA8E63-1F83-4096-B685-F0D4199669C1}" dt="2025-06-27T12:07:21.871" v="0"/>
+        <pc:sldMkLst>
+          <pc:docMk/>
+          <pc:sldMk cId="1961164702" sldId="536"/>
+        </pc:sldMkLst>
+      </pc:sldChg>
+      <pc:sldChg chg="addSp delSp modSp add mod setBg">
+        <pc:chgData name="Pramod Naik" userId="ceb6df04-ef15-4d9b-a141-998a03559d75" providerId="ADAL" clId="{2BBA8E63-1F83-4096-B685-F0D4199669C1}" dt="2025-06-27T12:11:23.952" v="56" actId="1076"/>
+        <pc:sldMkLst>
+          <pc:docMk/>
+          <pc:sldMk cId="2190670439" sldId="537"/>
+        </pc:sldMkLst>
+      </pc:sldChg>
+      <pc:sldChg chg="addSp delSp modSp add mod ord">
+        <pc:chgData name="Pramod Naik" userId="ceb6df04-ef15-4d9b-a141-998a03559d75" providerId="ADAL" clId="{2BBA8E63-1F83-4096-B685-F0D4199669C1}" dt="2025-06-27T12:10:16.046" v="40"/>
+        <pc:sldMkLst>
+          <pc:docMk/>
+          <pc:sldMk cId="3886295808" sldId="538"/>
+        </pc:sldMkLst>
+      </pc:sldChg>
+      <pc:sldChg chg="add">
+        <pc:chgData name="Pramod Naik" userId="ceb6df04-ef15-4d9b-a141-998a03559d75" providerId="ADAL" clId="{2BBA8E63-1F83-4096-B685-F0D4199669C1}" dt="2025-06-27T12:10:18.134" v="41"/>
+        <pc:sldMkLst>
+          <pc:docMk/>
+          <pc:sldMk cId="2303070927" sldId="539"/>
+        </pc:sldMkLst>
+      </pc:sldChg>
+      <pc:sldChg chg="add del">
+        <pc:chgData name="Pramod Naik" userId="ceb6df04-ef15-4d9b-a141-998a03559d75" providerId="ADAL" clId="{2BBA8E63-1F83-4096-B685-F0D4199669C1}" dt="2025-06-27T12:09:53.990" v="35"/>
+        <pc:sldMkLst>
+          <pc:docMk/>
+          <pc:sldMk cId="4238638134" sldId="539"/>
+        </pc:sldMkLst>
+      </pc:sldChg>
+      <pc:sldChg chg="add">
+        <pc:chgData name="Pramod Naik" userId="ceb6df04-ef15-4d9b-a141-998a03559d75" providerId="ADAL" clId="{2BBA8E63-1F83-4096-B685-F0D4199669C1}" dt="2025-06-27T12:10:18.332" v="42"/>
+        <pc:sldMkLst>
+          <pc:docMk/>
+          <pc:sldMk cId="2173694948" sldId="540"/>
+        </pc:sldMkLst>
+      </pc:sldChg>
+    </pc:docChg>
+  </pc:docChgLst>
+  <pc:docChgLst>
+    <pc:chgData name="Pramod Naik" userId="ceb6df04-ef15-4d9b-a141-998a03559d75" providerId="ADAL" clId="{D1D4E302-CA95-476B-B320-79C7EBDE6899}"/>
+    <pc:docChg chg="undo custSel addSld delSld modSld">
+      <pc:chgData name="Pramod Naik" userId="ceb6df04-ef15-4d9b-a141-998a03559d75" providerId="ADAL" clId="{D1D4E302-CA95-476B-B320-79C7EBDE6899}" dt="2025-09-04T20:26:20.323" v="8" actId="47"/>
+      <pc:docMkLst>
+        <pc:docMk/>
+      </pc:docMkLst>
+      <pc:sldChg chg="modSp">
+        <pc:chgData name="Pramod Naik" userId="ceb6df04-ef15-4d9b-a141-998a03559d75" providerId="ADAL" clId="{D1D4E302-CA95-476B-B320-79C7EBDE6899}" dt="2025-09-04T20:26:07.698" v="4" actId="1036"/>
+        <pc:sldMkLst>
+          <pc:docMk/>
+          <pc:sldMk cId="3886295808" sldId="538"/>
+        </pc:sldMkLst>
+      </pc:sldChg>
+      <pc:sldChg chg="del">
+        <pc:chgData name="Pramod Naik" userId="ceb6df04-ef15-4d9b-a141-998a03559d75" providerId="ADAL" clId="{D1D4E302-CA95-476B-B320-79C7EBDE6899}" dt="2025-09-04T20:26:19.563" v="7" actId="47"/>
+        <pc:sldMkLst>
+          <pc:docMk/>
+          <pc:sldMk cId="2303070927" sldId="539"/>
+        </pc:sldMkLst>
+      </pc:sldChg>
+      <pc:sldChg chg="add del">
+        <pc:chgData name="Pramod Naik" userId="ceb6df04-ef15-4d9b-a141-998a03559d75" providerId="ADAL" clId="{D1D4E302-CA95-476B-B320-79C7EBDE6899}" dt="2025-09-04T20:26:20.323" v="8" actId="47"/>
+        <pc:sldMkLst>
+          <pc:docMk/>
+          <pc:sldMk cId="2173694948" sldId="540"/>
+        </pc:sldMkLst>
       </pc:sldChg>
     </pc:docChg>
   </pc:docChgLst>
@@ -1267,7 +1243,7 @@
           <a:p>
             <a:fld id="{61532AF1-4615-4667-912A-829B12F8C4D2}" type="datetimeFigureOut">
               <a:rPr lang="en-IN" smtClean="0"/>
-              <a:t>10-10-2025</a:t>
+              <a:t>16-10-2025</a:t>
             </a:fld>
             <a:endParaRPr lang="en-IN"/>
           </a:p>
@@ -1684,7 +1660,7 @@
           <a:p>
             <a:fld id="{C43A76A3-ADC8-4477-8FC1-B9DD55D84908}" type="datetime1">
               <a:rPr lang="en-US" smtClean="0"/>
-              <a:t>10/10/2025</a:t>
+              <a:t>10/16/2025</a:t>
             </a:fld>
             <a:endParaRPr lang="en-US" dirty="0"/>
           </a:p>
@@ -1882,7 +1858,7 @@
           <a:p>
             <a:fld id="{D6762538-DC4D-4667-96E5-B3278DDF8B12}" type="datetime1">
               <a:rPr lang="en-US" smtClean="0"/>
-              <a:t>10/10/2025</a:t>
+              <a:t>10/16/2025</a:t>
             </a:fld>
             <a:endParaRPr lang="en-US"/>
           </a:p>
@@ -2090,7 +2066,7 @@
           <a:p>
             <a:fld id="{05880548-5C08-4BE3-B63E-F2BB63B0B00C}" type="datetime1">
               <a:rPr lang="en-US" smtClean="0"/>
-              <a:t>10/10/2025</a:t>
+              <a:t>10/16/2025</a:t>
             </a:fld>
             <a:endParaRPr lang="en-US"/>
           </a:p>
@@ -2288,7 +2264,7 @@
           <a:p>
             <a:fld id="{DE7F49BE-398D-479A-8A7E-5DDBCA61EDCB}" type="datetime1">
               <a:rPr lang="en-US" smtClean="0"/>
-              <a:t>10/10/2025</a:t>
+              <a:t>10/16/2025</a:t>
             </a:fld>
             <a:endParaRPr lang="en-US" dirty="0"/>
           </a:p>
@@ -2564,7 +2540,7 @@
           <a:p>
             <a:fld id="{CCD0C193-4974-4A1F-9C63-07D595E30D66}" type="datetime1">
               <a:rPr lang="en-US" smtClean="0"/>
-              <a:t>10/10/2025</a:t>
+              <a:t>10/16/2025</a:t>
             </a:fld>
             <a:endParaRPr lang="en-US"/>
           </a:p>
@@ -2831,7 +2807,7 @@
           <a:p>
             <a:fld id="{701AA87F-28D4-4BF0-B81F-877A89DFD5AC}" type="datetime1">
               <a:rPr lang="en-US" smtClean="0"/>
-              <a:t>10/10/2025</a:t>
+              <a:t>10/16/2025</a:t>
             </a:fld>
             <a:endParaRPr lang="en-US"/>
           </a:p>
@@ -3245,7 +3221,7 @@
           <a:p>
             <a:fld id="{A8A9F1F3-208B-49A3-B337-9C8ACEB3E0E1}" type="datetime1">
               <a:rPr lang="en-US" smtClean="0"/>
-              <a:t>10/10/2025</a:t>
+              <a:t>10/16/2025</a:t>
             </a:fld>
             <a:endParaRPr lang="en-US"/>
           </a:p>
@@ -3392,7 +3368,7 @@
           <a:p>
             <a:fld id="{27AF6CA6-7293-4AA2-A0E0-A3BF4416E786}" type="datetime1">
               <a:rPr lang="en-US" smtClean="0"/>
-              <a:t>10/10/2025</a:t>
+              <a:t>10/16/2025</a:t>
             </a:fld>
             <a:endParaRPr lang="en-US"/>
           </a:p>
@@ -3505,7 +3481,7 @@
           <a:p>
             <a:fld id="{98D87016-7BCD-46FB-8EE3-AB6C369108B4}" type="datetime1">
               <a:rPr lang="en-US" smtClean="0"/>
-              <a:t>10/10/2025</a:t>
+              <a:t>10/16/2025</a:t>
             </a:fld>
             <a:endParaRPr lang="en-US"/>
           </a:p>
@@ -3824,7 +3800,7 @@
           <a:p>
             <a:fld id="{A1547011-1FFC-4EF8-9A2E-53B4AD2ADBD4}" type="datetime1">
               <a:rPr lang="en-US" smtClean="0"/>
-              <a:t>10/10/2025</a:t>
+              <a:t>10/16/2025</a:t>
             </a:fld>
             <a:endParaRPr lang="en-US"/>
           </a:p>
@@ -4119,7 +4095,7 @@
           <a:p>
             <a:fld id="{9562EB47-45B4-4EF5-A743-B4885DD2F060}" type="datetime1">
               <a:rPr lang="en-US" smtClean="0"/>
-              <a:t>10/10/2025</a:t>
+              <a:t>10/16/2025</a:t>
             </a:fld>
             <a:endParaRPr lang="en-US"/>
           </a:p>
@@ -5504,7 +5480,7 @@
           <a:p>
             <a:fld id="{4A8D24A4-5FEC-4062-8995-EB21925B3B40}" type="datetime1">
               <a:rPr lang="en-US" smtClean="0"/>
-              <a:t>10/10/2025</a:t>
+              <a:t>10/16/2025</a:t>
             </a:fld>
             <a:endParaRPr lang="en-US" sz="1000" dirty="0"/>
           </a:p>
@@ -12925,6 +12901,81 @@
   <p:cSld>
     <p:spTree>
       <p:nvGrpSpPr>
+        <p:cNvPr id="1" name=""/>
+        <p:cNvGrpSpPr/>
+        <p:nvPr/>
+      </p:nvGrpSpPr>
+      <p:grpSpPr>
+        <a:xfrm>
+          <a:off x="0" y="0"/>
+          <a:ext cx="0" cy="0"/>
+          <a:chOff x="0" y="0"/>
+          <a:chExt cx="0" cy="0"/>
+        </a:xfrm>
+      </p:grpSpPr>
+      <p:sp>
+        <p:nvSpPr>
+          <p:cNvPr id="3" name="Content Placeholder 2">
+            <a:extLst>
+              <a:ext uri="{FF2B5EF4-FFF2-40B4-BE49-F238E27FC236}">
+                <a16:creationId xmlns:a16="http://schemas.microsoft.com/office/drawing/2014/main" id="{A7AA8225-E560-3C4E-153E-A108BFE096E7}"/>
+              </a:ext>
+            </a:extLst>
+          </p:cNvPr>
+          <p:cNvSpPr>
+            <a:spLocks noGrp="1"/>
+          </p:cNvSpPr>
+          <p:nvPr>
+            <p:ph idx="1"/>
+          </p:nvPr>
+        </p:nvSpPr>
+        <p:spPr>
+          <a:xfrm>
+            <a:off x="777240" y="1825625"/>
+            <a:ext cx="10659110" cy="961118"/>
+          </a:xfrm>
+        </p:spPr>
+        <p:txBody>
+          <a:bodyPr>
+            <a:normAutofit/>
+          </a:bodyPr>
+          <a:lstStyle/>
+          <a:p>
+            <a:pPr marL="0" indent="0">
+              <a:buNone/>
+            </a:pPr>
+            <a:r>
+              <a:rPr lang="en-IN" sz="2800" b="1" dirty="0">
+                <a:solidFill>
+                  <a:schemeClr val="tx2">
+                    <a:lumMod val="75000"/>
+                    <a:lumOff val="25000"/>
+                  </a:schemeClr>
+                </a:solidFill>
+              </a:rPr>
+              <a:t>To be Continued</a:t>
+            </a:r>
+          </a:p>
+        </p:txBody>
+      </p:sp>
+    </p:spTree>
+    <p:extLst>
+      <p:ext uri="{BB962C8B-B14F-4D97-AF65-F5344CB8AC3E}">
+        <p14:creationId xmlns:p14="http://schemas.microsoft.com/office/powerpoint/2010/main" val="3323179440"/>
+      </p:ext>
+    </p:extLst>
+  </p:cSld>
+  <p:clrMapOvr>
+    <a:masterClrMapping/>
+  </p:clrMapOvr>
+</p:sld>
+</file>
+
+<file path=ppt/slides/slide28.xml><?xml version="1.0" encoding="utf-8"?>
+<p:sld xmlns:a="http://schemas.openxmlformats.org/drawingml/2006/main" xmlns:r="http://schemas.openxmlformats.org/officeDocument/2006/relationships" xmlns:p="http://schemas.openxmlformats.org/presentationml/2006/main">
+  <p:cSld>
+    <p:spTree>
+      <p:nvGrpSpPr>
         <p:cNvPr id="1" name="">
           <a:extLst>
             <a:ext uri="{FF2B5EF4-FFF2-40B4-BE49-F238E27FC236}">
@@ -13250,7 +13301,7 @@
 </p:sld>
 </file>
 
-<file path=ppt/slides/slide28.xml><?xml version="1.0" encoding="utf-8"?>
+<file path=ppt/slides/slide29.xml><?xml version="1.0" encoding="utf-8"?>
 <p:sld xmlns:a="http://schemas.openxmlformats.org/drawingml/2006/main" xmlns:r="http://schemas.openxmlformats.org/officeDocument/2006/relationships" xmlns:p="http://schemas.openxmlformats.org/presentationml/2006/main">
   <p:cSld>
     <p:spTree>
@@ -13430,247 +13481,6 @@
     <p:extLst>
       <p:ext uri="{BB962C8B-B14F-4D97-AF65-F5344CB8AC3E}">
         <p14:creationId xmlns:p14="http://schemas.microsoft.com/office/powerpoint/2010/main" val="535661125"/>
-      </p:ext>
-    </p:extLst>
-  </p:cSld>
-  <p:clrMapOvr>
-    <a:masterClrMapping/>
-  </p:clrMapOvr>
-</p:sld>
-</file>
-
-<file path=ppt/slides/slide29.xml><?xml version="1.0" encoding="utf-8"?>
-<p:sld xmlns:a="http://schemas.openxmlformats.org/drawingml/2006/main" xmlns:r="http://schemas.openxmlformats.org/officeDocument/2006/relationships" xmlns:p="http://schemas.openxmlformats.org/presentationml/2006/main">
-  <p:cSld>
-    <p:spTree>
-      <p:nvGrpSpPr>
-        <p:cNvPr id="1" name="">
-          <a:extLst>
-            <a:ext uri="{FF2B5EF4-FFF2-40B4-BE49-F238E27FC236}">
-              <a16:creationId xmlns:a16="http://schemas.microsoft.com/office/drawing/2014/main" id="{EED8E631-2C73-32E8-1AD6-90FADD7DCBC6}"/>
-            </a:ext>
-          </a:extLst>
-        </p:cNvPr>
-        <p:cNvGrpSpPr/>
-        <p:nvPr/>
-      </p:nvGrpSpPr>
-      <p:grpSpPr>
-        <a:xfrm>
-          <a:off x="0" y="0"/>
-          <a:ext cx="0" cy="0"/>
-          <a:chOff x="0" y="0"/>
-          <a:chExt cx="0" cy="0"/>
-        </a:xfrm>
-      </p:grpSpPr>
-      <p:sp>
-        <p:nvSpPr>
-          <p:cNvPr id="3" name="Content Placeholder 2">
-            <a:extLst>
-              <a:ext uri="{FF2B5EF4-FFF2-40B4-BE49-F238E27FC236}">
-                <a16:creationId xmlns:a16="http://schemas.microsoft.com/office/drawing/2014/main" id="{1632F12C-E6C8-8BCC-F163-7DDC7C8005B5}"/>
-              </a:ext>
-            </a:extLst>
-          </p:cNvPr>
-          <p:cNvSpPr>
-            <a:spLocks noGrp="1"/>
-          </p:cNvSpPr>
-          <p:nvPr>
-            <p:ph idx="1"/>
-          </p:nvPr>
-        </p:nvSpPr>
-        <p:spPr>
-          <a:xfrm>
-            <a:off x="777239" y="592183"/>
-            <a:ext cx="10924765" cy="5584780"/>
-          </a:xfrm>
-        </p:spPr>
-        <p:txBody>
-          <a:bodyPr>
-            <a:normAutofit lnSpcReduction="10000"/>
-          </a:bodyPr>
-          <a:lstStyle/>
-          <a:p>
-            <a:pPr marL="0" indent="0">
-              <a:buNone/>
-            </a:pPr>
-            <a:r>
-              <a:rPr lang="en-US" sz="2800" b="1" dirty="0">
-                <a:solidFill>
-                  <a:srgbClr val="C00000"/>
-                </a:solidFill>
-              </a:rPr>
-              <a:t>Limitations of Traditional Web Servers:</a:t>
-            </a:r>
-          </a:p>
-          <a:p>
-            <a:pPr marL="0" indent="0">
-              <a:buNone/>
-            </a:pPr>
-            <a:r>
-              <a:rPr lang="en-US" sz="2400" b="1" dirty="0"/>
-              <a:t>1. Thread-Based Handling:</a:t>
-            </a:r>
-          </a:p>
-          <a:p>
-            <a:pPr marL="0" indent="0">
-              <a:buNone/>
-            </a:pPr>
-            <a:r>
-              <a:rPr lang="en-US" sz="2200" b="1" dirty="0"/>
-              <a:t>Model:</a:t>
-            </a:r>
-            <a:r>
-              <a:rPr lang="en-US" sz="2200" dirty="0"/>
-              <a:t> Traditional servers </a:t>
-            </a:r>
-            <a:r>
-              <a:rPr lang="en-US" sz="2200" b="1" dirty="0"/>
-              <a:t>spawn a new thread </a:t>
-            </a:r>
-            <a:r>
-              <a:rPr lang="en-US" sz="2200" dirty="0"/>
-              <a:t>or </a:t>
-            </a:r>
-            <a:r>
-              <a:rPr lang="en-US" sz="2200" b="1" dirty="0"/>
-              <a:t>process</a:t>
-            </a:r>
-            <a:r>
-              <a:rPr lang="en-US" sz="2200" dirty="0"/>
-              <a:t> for each incoming connection.</a:t>
-            </a:r>
-          </a:p>
-          <a:p>
-            <a:pPr marL="0" indent="0">
-              <a:buNone/>
-            </a:pPr>
-            <a:r>
-              <a:rPr lang="en-US" sz="2200" b="1" dirty="0"/>
-              <a:t>Limitations:</a:t>
-            </a:r>
-            <a:endParaRPr lang="en-US" sz="2200" dirty="0"/>
-          </a:p>
-          <a:p>
-            <a:pPr lvl="1"/>
-            <a:r>
-              <a:rPr lang="en-US" sz="2200" dirty="0"/>
-              <a:t>High memory consumption as each thread/process requires a dedicated memory space.</a:t>
-            </a:r>
-          </a:p>
-          <a:p>
-            <a:pPr lvl="1"/>
-            <a:r>
-              <a:rPr lang="en-US" sz="2200" dirty="0"/>
-              <a:t>Increased CPU overhead when managing thousands of threads.</a:t>
-            </a:r>
-          </a:p>
-          <a:p>
-            <a:pPr lvl="1"/>
-            <a:r>
-              <a:rPr lang="en-US" sz="2200" dirty="0"/>
-              <a:t>Poor scalability when handling a large number of concurrent connections.</a:t>
-            </a:r>
-          </a:p>
-          <a:p>
-            <a:pPr marL="457200" lvl="1" indent="0">
-              <a:buNone/>
-            </a:pPr>
-            <a:endParaRPr lang="en-US" dirty="0"/>
-          </a:p>
-          <a:p>
-            <a:pPr marL="0" indent="0">
-              <a:buNone/>
-            </a:pPr>
-            <a:r>
-              <a:rPr lang="en-US" sz="2400" b="1" dirty="0"/>
-              <a:t>2. Blocking I/O Operations:</a:t>
-            </a:r>
-          </a:p>
-          <a:p>
-            <a:pPr marL="0" indent="0">
-              <a:buNone/>
-            </a:pPr>
-            <a:r>
-              <a:rPr lang="en-US" sz="2200" b="1" dirty="0"/>
-              <a:t>Nature:</a:t>
-            </a:r>
-            <a:r>
-              <a:rPr lang="en-US" sz="2200" dirty="0"/>
-              <a:t> Many traditional servers use a blocking I/O model, where a thread waits for disk or network operations to complete. This thread </a:t>
-            </a:r>
-            <a:r>
-              <a:rPr lang="en-US" sz="2200" b="1" dirty="0">
-                <a:solidFill>
-                  <a:srgbClr val="C00000"/>
-                </a:solidFill>
-              </a:rPr>
-              <a:t>cannot do anything else</a:t>
-            </a:r>
-            <a:r>
-              <a:rPr lang="en-US" sz="2200" dirty="0">
-                <a:solidFill>
-                  <a:srgbClr val="C00000"/>
-                </a:solidFill>
-              </a:rPr>
-              <a:t> </a:t>
-            </a:r>
-            <a:r>
-              <a:rPr lang="en-US" sz="2200" dirty="0"/>
-              <a:t>during that time.</a:t>
-            </a:r>
-          </a:p>
-          <a:p>
-            <a:pPr marL="0" indent="0">
-              <a:buNone/>
-            </a:pPr>
-            <a:r>
-              <a:rPr lang="en-US" sz="2200" b="1" dirty="0"/>
-              <a:t>Impact:</a:t>
-            </a:r>
-            <a:endParaRPr lang="en-US" sz="2200" dirty="0"/>
-          </a:p>
-          <a:p>
-            <a:pPr marL="742950" lvl="1" indent="-285750">
-              <a:buFont typeface="Arial" panose="020B0604020202020204" pitchFamily="34" charset="0"/>
-              <a:buChar char="•"/>
-            </a:pPr>
-            <a:r>
-              <a:rPr lang="en-US" sz="2200" dirty="0"/>
-              <a:t>Wastes server resources by keeping threads idle.</a:t>
-            </a:r>
-          </a:p>
-          <a:p>
-            <a:pPr marL="742950" lvl="1" indent="-285750">
-              <a:buFont typeface="Arial" panose="020B0604020202020204" pitchFamily="34" charset="0"/>
-              <a:buChar char="•"/>
-            </a:pPr>
-            <a:r>
-              <a:rPr lang="en-US" sz="2200" dirty="0"/>
-              <a:t>Reduces overall throughput for applications requiring high concurrency.</a:t>
-            </a:r>
-          </a:p>
-          <a:p>
-            <a:pPr marL="742950" lvl="1" indent="-285750">
-              <a:buFont typeface="Arial" panose="020B0604020202020204" pitchFamily="34" charset="0"/>
-              <a:buChar char="•"/>
-            </a:pPr>
-            <a:r>
-              <a:rPr lang="en-US" sz="2200" dirty="0"/>
-              <a:t>Slower response times for I/O-heavy workloads.</a:t>
-            </a:r>
-          </a:p>
-          <a:p>
-            <a:pPr marL="0" indent="0">
-              <a:buNone/>
-            </a:pPr>
-            <a:endParaRPr lang="en-IN" dirty="0"/>
-          </a:p>
-        </p:txBody>
-      </p:sp>
-    </p:spTree>
-    <p:extLst>
-      <p:ext uri="{BB962C8B-B14F-4D97-AF65-F5344CB8AC3E}">
-        <p14:creationId xmlns:p14="http://schemas.microsoft.com/office/powerpoint/2010/main" val="3009349544"/>
       </p:ext>
     </p:extLst>
   </p:cSld>
@@ -15785,6 +15595,247 @@
         <p:cNvPr id="1" name="">
           <a:extLst>
             <a:ext uri="{FF2B5EF4-FFF2-40B4-BE49-F238E27FC236}">
+              <a16:creationId xmlns:a16="http://schemas.microsoft.com/office/drawing/2014/main" id="{EED8E631-2C73-32E8-1AD6-90FADD7DCBC6}"/>
+            </a:ext>
+          </a:extLst>
+        </p:cNvPr>
+        <p:cNvGrpSpPr/>
+        <p:nvPr/>
+      </p:nvGrpSpPr>
+      <p:grpSpPr>
+        <a:xfrm>
+          <a:off x="0" y="0"/>
+          <a:ext cx="0" cy="0"/>
+          <a:chOff x="0" y="0"/>
+          <a:chExt cx="0" cy="0"/>
+        </a:xfrm>
+      </p:grpSpPr>
+      <p:sp>
+        <p:nvSpPr>
+          <p:cNvPr id="3" name="Content Placeholder 2">
+            <a:extLst>
+              <a:ext uri="{FF2B5EF4-FFF2-40B4-BE49-F238E27FC236}">
+                <a16:creationId xmlns:a16="http://schemas.microsoft.com/office/drawing/2014/main" id="{1632F12C-E6C8-8BCC-F163-7DDC7C8005B5}"/>
+              </a:ext>
+            </a:extLst>
+          </p:cNvPr>
+          <p:cNvSpPr>
+            <a:spLocks noGrp="1"/>
+          </p:cNvSpPr>
+          <p:nvPr>
+            <p:ph idx="1"/>
+          </p:nvPr>
+        </p:nvSpPr>
+        <p:spPr>
+          <a:xfrm>
+            <a:off x="777239" y="592183"/>
+            <a:ext cx="10924765" cy="5584780"/>
+          </a:xfrm>
+        </p:spPr>
+        <p:txBody>
+          <a:bodyPr>
+            <a:normAutofit lnSpcReduction="10000"/>
+          </a:bodyPr>
+          <a:lstStyle/>
+          <a:p>
+            <a:pPr marL="0" indent="0">
+              <a:buNone/>
+            </a:pPr>
+            <a:r>
+              <a:rPr lang="en-US" sz="2800" b="1" dirty="0">
+                <a:solidFill>
+                  <a:srgbClr val="C00000"/>
+                </a:solidFill>
+              </a:rPr>
+              <a:t>Limitations of Traditional Web Servers:</a:t>
+            </a:r>
+          </a:p>
+          <a:p>
+            <a:pPr marL="0" indent="0">
+              <a:buNone/>
+            </a:pPr>
+            <a:r>
+              <a:rPr lang="en-US" sz="2400" b="1" dirty="0"/>
+              <a:t>1. Thread-Based Handling:</a:t>
+            </a:r>
+          </a:p>
+          <a:p>
+            <a:pPr marL="0" indent="0">
+              <a:buNone/>
+            </a:pPr>
+            <a:r>
+              <a:rPr lang="en-US" sz="2200" b="1" dirty="0"/>
+              <a:t>Model:</a:t>
+            </a:r>
+            <a:r>
+              <a:rPr lang="en-US" sz="2200" dirty="0"/>
+              <a:t> Traditional servers </a:t>
+            </a:r>
+            <a:r>
+              <a:rPr lang="en-US" sz="2200" b="1" dirty="0"/>
+              <a:t>spawn a new thread </a:t>
+            </a:r>
+            <a:r>
+              <a:rPr lang="en-US" sz="2200" dirty="0"/>
+              <a:t>or </a:t>
+            </a:r>
+            <a:r>
+              <a:rPr lang="en-US" sz="2200" b="1" dirty="0"/>
+              <a:t>process</a:t>
+            </a:r>
+            <a:r>
+              <a:rPr lang="en-US" sz="2200" dirty="0"/>
+              <a:t> for each incoming connection.</a:t>
+            </a:r>
+          </a:p>
+          <a:p>
+            <a:pPr marL="0" indent="0">
+              <a:buNone/>
+            </a:pPr>
+            <a:r>
+              <a:rPr lang="en-US" sz="2200" b="1" dirty="0"/>
+              <a:t>Limitations:</a:t>
+            </a:r>
+            <a:endParaRPr lang="en-US" sz="2200" dirty="0"/>
+          </a:p>
+          <a:p>
+            <a:pPr lvl="1"/>
+            <a:r>
+              <a:rPr lang="en-US" sz="2200" dirty="0"/>
+              <a:t>High memory consumption as each thread/process requires a dedicated memory space.</a:t>
+            </a:r>
+          </a:p>
+          <a:p>
+            <a:pPr lvl="1"/>
+            <a:r>
+              <a:rPr lang="en-US" sz="2200" dirty="0"/>
+              <a:t>Increased CPU overhead when managing thousands of threads.</a:t>
+            </a:r>
+          </a:p>
+          <a:p>
+            <a:pPr lvl="1"/>
+            <a:r>
+              <a:rPr lang="en-US" sz="2200" dirty="0"/>
+              <a:t>Poor scalability when handling a large number of concurrent connections.</a:t>
+            </a:r>
+          </a:p>
+          <a:p>
+            <a:pPr marL="457200" lvl="1" indent="0">
+              <a:buNone/>
+            </a:pPr>
+            <a:endParaRPr lang="en-US" dirty="0"/>
+          </a:p>
+          <a:p>
+            <a:pPr marL="0" indent="0">
+              <a:buNone/>
+            </a:pPr>
+            <a:r>
+              <a:rPr lang="en-US" sz="2400" b="1" dirty="0"/>
+              <a:t>2. Blocking I/O Operations:</a:t>
+            </a:r>
+          </a:p>
+          <a:p>
+            <a:pPr marL="0" indent="0">
+              <a:buNone/>
+            </a:pPr>
+            <a:r>
+              <a:rPr lang="en-US" sz="2200" b="1" dirty="0"/>
+              <a:t>Nature:</a:t>
+            </a:r>
+            <a:r>
+              <a:rPr lang="en-US" sz="2200" dirty="0"/>
+              <a:t> Many traditional servers use a blocking I/O model, where a thread waits for disk or network operations to complete. This thread </a:t>
+            </a:r>
+            <a:r>
+              <a:rPr lang="en-US" sz="2200" b="1" dirty="0">
+                <a:solidFill>
+                  <a:srgbClr val="C00000"/>
+                </a:solidFill>
+              </a:rPr>
+              <a:t>cannot do anything else</a:t>
+            </a:r>
+            <a:r>
+              <a:rPr lang="en-US" sz="2200" dirty="0">
+                <a:solidFill>
+                  <a:srgbClr val="C00000"/>
+                </a:solidFill>
+              </a:rPr>
+              <a:t> </a:t>
+            </a:r>
+            <a:r>
+              <a:rPr lang="en-US" sz="2200" dirty="0"/>
+              <a:t>during that time.</a:t>
+            </a:r>
+          </a:p>
+          <a:p>
+            <a:pPr marL="0" indent="0">
+              <a:buNone/>
+            </a:pPr>
+            <a:r>
+              <a:rPr lang="en-US" sz="2200" b="1" dirty="0"/>
+              <a:t>Impact:</a:t>
+            </a:r>
+            <a:endParaRPr lang="en-US" sz="2200" dirty="0"/>
+          </a:p>
+          <a:p>
+            <a:pPr marL="742950" lvl="1" indent="-285750">
+              <a:buFont typeface="Arial" panose="020B0604020202020204" pitchFamily="34" charset="0"/>
+              <a:buChar char="•"/>
+            </a:pPr>
+            <a:r>
+              <a:rPr lang="en-US" sz="2200" dirty="0"/>
+              <a:t>Wastes server resources by keeping threads idle.</a:t>
+            </a:r>
+          </a:p>
+          <a:p>
+            <a:pPr marL="742950" lvl="1" indent="-285750">
+              <a:buFont typeface="Arial" panose="020B0604020202020204" pitchFamily="34" charset="0"/>
+              <a:buChar char="•"/>
+            </a:pPr>
+            <a:r>
+              <a:rPr lang="en-US" sz="2200" dirty="0"/>
+              <a:t>Reduces overall throughput for applications requiring high concurrency.</a:t>
+            </a:r>
+          </a:p>
+          <a:p>
+            <a:pPr marL="742950" lvl="1" indent="-285750">
+              <a:buFont typeface="Arial" panose="020B0604020202020204" pitchFamily="34" charset="0"/>
+              <a:buChar char="•"/>
+            </a:pPr>
+            <a:r>
+              <a:rPr lang="en-US" sz="2200" dirty="0"/>
+              <a:t>Slower response times for I/O-heavy workloads.</a:t>
+            </a:r>
+          </a:p>
+          <a:p>
+            <a:pPr marL="0" indent="0">
+              <a:buNone/>
+            </a:pPr>
+            <a:endParaRPr lang="en-IN" dirty="0"/>
+          </a:p>
+        </p:txBody>
+      </p:sp>
+    </p:spTree>
+    <p:extLst>
+      <p:ext uri="{BB962C8B-B14F-4D97-AF65-F5344CB8AC3E}">
+        <p14:creationId xmlns:p14="http://schemas.microsoft.com/office/powerpoint/2010/main" val="3009349544"/>
+      </p:ext>
+    </p:extLst>
+  </p:cSld>
+  <p:clrMapOvr>
+    <a:masterClrMapping/>
+  </p:clrMapOvr>
+</p:sld>
+</file>
+
+<file path=ppt/slides/slide31.xml><?xml version="1.0" encoding="utf-8"?>
+<p:sld xmlns:a="http://schemas.openxmlformats.org/drawingml/2006/main" xmlns:r="http://schemas.openxmlformats.org/officeDocument/2006/relationships" xmlns:p="http://schemas.openxmlformats.org/presentationml/2006/main">
+  <p:cSld>
+    <p:spTree>
+      <p:nvGrpSpPr>
+        <p:cNvPr id="1" name="">
+          <a:extLst>
+            <a:ext uri="{FF2B5EF4-FFF2-40B4-BE49-F238E27FC236}">
               <a16:creationId xmlns:a16="http://schemas.microsoft.com/office/drawing/2014/main" id="{11183051-0FC8-FC88-9D9C-1236A5D4D11B}"/>
             </a:ext>
           </a:extLst>
@@ -16104,7 +16155,7 @@
 </p:sld>
 </file>
 
-<file path=ppt/slides/slide31.xml><?xml version="1.0" encoding="utf-8"?>
+<file path=ppt/slides/slide32.xml><?xml version="1.0" encoding="utf-8"?>
 <p:sld xmlns:a="http://schemas.openxmlformats.org/drawingml/2006/main" xmlns:r="http://schemas.openxmlformats.org/officeDocument/2006/relationships" xmlns:p="http://schemas.openxmlformats.org/presentationml/2006/main">
   <p:cSld>
     <p:spTree>
@@ -16317,7 +16368,7 @@
 </p:sld>
 </file>
 
-<file path=ppt/slides/slide32.xml><?xml version="1.0" encoding="utf-8"?>
+<file path=ppt/slides/slide33.xml><?xml version="1.0" encoding="utf-8"?>
 <p:sld xmlns:a="http://schemas.openxmlformats.org/drawingml/2006/main" xmlns:r="http://schemas.openxmlformats.org/officeDocument/2006/relationships" xmlns:p="http://schemas.openxmlformats.org/presentationml/2006/main">
   <p:cSld>
     <p:bg>
@@ -17765,7 +17816,7 @@
 </p:sld>
 </file>
 
-<file path=ppt/slides/slide33.xml><?xml version="1.0" encoding="utf-8"?>
+<file path=ppt/slides/slide34.xml><?xml version="1.0" encoding="utf-8"?>
 <p:sld xmlns:a="http://schemas.openxmlformats.org/drawingml/2006/main" xmlns:r="http://schemas.openxmlformats.org/officeDocument/2006/relationships" xmlns:p="http://schemas.openxmlformats.org/presentationml/2006/main">
   <p:cSld>
     <p:spTree>
@@ -17933,7 +17984,7 @@
 </p:sld>
 </file>
 
-<file path=ppt/slides/slide34.xml><?xml version="1.0" encoding="utf-8"?>
+<file path=ppt/slides/slide35.xml><?xml version="1.0" encoding="utf-8"?>
 <p:sld xmlns:a="http://schemas.openxmlformats.org/drawingml/2006/main" xmlns:r="http://schemas.openxmlformats.org/officeDocument/2006/relationships" xmlns:p="http://schemas.openxmlformats.org/presentationml/2006/main">
   <p:cSld>
     <p:spTree>
@@ -18086,7 +18137,7 @@
 </p:sld>
 </file>
 
-<file path=ppt/slides/slide35.xml><?xml version="1.0" encoding="utf-8"?>
+<file path=ppt/slides/slide36.xml><?xml version="1.0" encoding="utf-8"?>
 <p:sld xmlns:a="http://schemas.openxmlformats.org/drawingml/2006/main" xmlns:r="http://schemas.openxmlformats.org/officeDocument/2006/relationships" xmlns:p="http://schemas.openxmlformats.org/presentationml/2006/main">
   <p:cSld>
     <p:spTree>
@@ -18286,7 +18337,7 @@
 </p:sld>
 </file>
 
-<file path=ppt/slides/slide36.xml><?xml version="1.0" encoding="utf-8"?>
+<file path=ppt/slides/slide37.xml><?xml version="1.0" encoding="utf-8"?>
 <p:sld xmlns:a="http://schemas.openxmlformats.org/drawingml/2006/main" xmlns:r="http://schemas.openxmlformats.org/officeDocument/2006/relationships" xmlns:p="http://schemas.openxmlformats.org/presentationml/2006/main">
   <p:cSld>
     <p:spTree>
@@ -18416,7 +18467,7 @@
 </p:sld>
 </file>
 
-<file path=ppt/slides/slide37.xml><?xml version="1.0" encoding="utf-8"?>
+<file path=ppt/slides/slide38.xml><?xml version="1.0" encoding="utf-8"?>
 <p:sld xmlns:a="http://schemas.openxmlformats.org/drawingml/2006/main" xmlns:r="http://schemas.openxmlformats.org/officeDocument/2006/relationships" xmlns:p="http://schemas.openxmlformats.org/presentationml/2006/main">
   <p:cSld>
     <p:spTree>
@@ -18605,7 +18656,7 @@
 </p:sld>
 </file>
 
-<file path=ppt/slides/slide38.xml><?xml version="1.0" encoding="utf-8"?>
+<file path=ppt/slides/slide39.xml><?xml version="1.0" encoding="utf-8"?>
 <p:sld xmlns:a="http://schemas.openxmlformats.org/drawingml/2006/main" xmlns:r="http://schemas.openxmlformats.org/officeDocument/2006/relationships" xmlns:p="http://schemas.openxmlformats.org/presentationml/2006/main">
   <p:cSld>
     <p:spTree>
@@ -18821,155 +18872,6 @@
     <p:extLst>
       <p:ext uri="{BB962C8B-B14F-4D97-AF65-F5344CB8AC3E}">
         <p14:creationId xmlns:p14="http://schemas.microsoft.com/office/powerpoint/2010/main" val="1158287235"/>
-      </p:ext>
-    </p:extLst>
-  </p:cSld>
-  <p:clrMapOvr>
-    <a:masterClrMapping/>
-  </p:clrMapOvr>
-</p:sld>
-</file>
-
-<file path=ppt/slides/slide39.xml><?xml version="1.0" encoding="utf-8"?>
-<p:sld xmlns:a="http://schemas.openxmlformats.org/drawingml/2006/main" xmlns:r="http://schemas.openxmlformats.org/officeDocument/2006/relationships" xmlns:p="http://schemas.openxmlformats.org/presentationml/2006/main">
-  <p:cSld>
-    <p:spTree>
-      <p:nvGrpSpPr>
-        <p:cNvPr id="1" name="">
-          <a:extLst>
-            <a:ext uri="{FF2B5EF4-FFF2-40B4-BE49-F238E27FC236}">
-              <a16:creationId xmlns:a16="http://schemas.microsoft.com/office/drawing/2014/main" id="{54C11AC9-B91F-23B2-1250-2DCDFC735C14}"/>
-            </a:ext>
-          </a:extLst>
-        </p:cNvPr>
-        <p:cNvGrpSpPr/>
-        <p:nvPr/>
-      </p:nvGrpSpPr>
-      <p:grpSpPr>
-        <a:xfrm>
-          <a:off x="0" y="0"/>
-          <a:ext cx="0" cy="0"/>
-          <a:chOff x="0" y="0"/>
-          <a:chExt cx="0" cy="0"/>
-        </a:xfrm>
-      </p:grpSpPr>
-      <p:sp>
-        <p:nvSpPr>
-          <p:cNvPr id="3" name="Content Placeholder 2">
-            <a:extLst>
-              <a:ext uri="{FF2B5EF4-FFF2-40B4-BE49-F238E27FC236}">
-                <a16:creationId xmlns:a16="http://schemas.microsoft.com/office/drawing/2014/main" id="{09E08A81-2D84-22E8-B6B7-DC43D687C6FE}"/>
-              </a:ext>
-            </a:extLst>
-          </p:cNvPr>
-          <p:cNvSpPr>
-            <a:spLocks noGrp="1"/>
-          </p:cNvSpPr>
-          <p:nvPr>
-            <p:ph idx="1"/>
-          </p:nvPr>
-        </p:nvSpPr>
-        <p:spPr>
-          <a:xfrm>
-            <a:off x="777240" y="696686"/>
-            <a:ext cx="10659110" cy="5480277"/>
-          </a:xfrm>
-        </p:spPr>
-        <p:txBody>
-          <a:bodyPr>
-            <a:normAutofit/>
-          </a:bodyPr>
-          <a:lstStyle/>
-          <a:p>
-            <a:pPr>
-              <a:buNone/>
-            </a:pPr>
-            <a:r>
-              <a:rPr lang="en-US" sz="2400" b="1" dirty="0"/>
-              <a:t>2. Backend receives the requests</a:t>
-            </a:r>
-          </a:p>
-          <a:p>
-            <a:r>
-              <a:rPr lang="en-US" sz="2400" dirty="0"/>
-              <a:t>Each request is handled in the </a:t>
-            </a:r>
-            <a:r>
-              <a:rPr lang="en-US" sz="2400" b="1" dirty="0">
-                <a:solidFill>
-                  <a:srgbClr val="C00000"/>
-                </a:solidFill>
-              </a:rPr>
-              <a:t>main thread</a:t>
-            </a:r>
-            <a:r>
-              <a:rPr lang="en-US" sz="2400" dirty="0"/>
-              <a:t>, which is running the </a:t>
-            </a:r>
-            <a:r>
-              <a:rPr lang="en-US" sz="2400" b="1" dirty="0">
-                <a:solidFill>
-                  <a:srgbClr val="C00000"/>
-                </a:solidFill>
-              </a:rPr>
-              <a:t>Event Loop</a:t>
-            </a:r>
-            <a:r>
-              <a:rPr lang="en-US" sz="2400" dirty="0"/>
-              <a:t>.</a:t>
-            </a:r>
-          </a:p>
-          <a:p>
-            <a:pPr marL="0" indent="0">
-              <a:buNone/>
-            </a:pPr>
-            <a:r>
-              <a:rPr lang="en-IN" sz="2400" b="1" dirty="0"/>
-              <a:t>Example:</a:t>
-            </a:r>
-          </a:p>
-          <a:p>
-            <a:pPr marL="0" indent="0">
-              <a:buNone/>
-            </a:pPr>
-            <a:endParaRPr lang="en-IN" sz="2400" b="1" dirty="0"/>
-          </a:p>
-        </p:txBody>
-      </p:sp>
-      <p:pic>
-        <p:nvPicPr>
-          <p:cNvPr id="4" name="Picture 3">
-            <a:extLst>
-              <a:ext uri="{FF2B5EF4-FFF2-40B4-BE49-F238E27FC236}">
-                <a16:creationId xmlns:a16="http://schemas.microsoft.com/office/drawing/2014/main" id="{4FF4C4FA-AAE7-E229-24DF-3E345DD1E7A3}"/>
-              </a:ext>
-            </a:extLst>
-          </p:cNvPr>
-          <p:cNvPicPr>
-            <a:picLocks noChangeAspect="1"/>
-          </p:cNvPicPr>
-          <p:nvPr/>
-        </p:nvPicPr>
-        <p:blipFill>
-          <a:blip r:embed="rId2"/>
-          <a:stretch>
-            <a:fillRect/>
-          </a:stretch>
-        </p:blipFill>
-        <p:spPr>
-          <a:xfrm>
-            <a:off x="918439" y="2385523"/>
-            <a:ext cx="10180952" cy="3066667"/>
-          </a:xfrm>
-          <a:prstGeom prst="rect">
-            <a:avLst/>
-          </a:prstGeom>
-        </p:spPr>
-      </p:pic>
-    </p:spTree>
-    <p:extLst>
-      <p:ext uri="{BB962C8B-B14F-4D97-AF65-F5344CB8AC3E}">
-        <p14:creationId xmlns:p14="http://schemas.microsoft.com/office/powerpoint/2010/main" val="1197408662"/>
       </p:ext>
     </p:extLst>
   </p:cSld>
@@ -19098,6 +19000,155 @@
 </file>
 
 <file path=ppt/slides/slide40.xml><?xml version="1.0" encoding="utf-8"?>
+<p:sld xmlns:a="http://schemas.openxmlformats.org/drawingml/2006/main" xmlns:r="http://schemas.openxmlformats.org/officeDocument/2006/relationships" xmlns:p="http://schemas.openxmlformats.org/presentationml/2006/main">
+  <p:cSld>
+    <p:spTree>
+      <p:nvGrpSpPr>
+        <p:cNvPr id="1" name="">
+          <a:extLst>
+            <a:ext uri="{FF2B5EF4-FFF2-40B4-BE49-F238E27FC236}">
+              <a16:creationId xmlns:a16="http://schemas.microsoft.com/office/drawing/2014/main" id="{54C11AC9-B91F-23B2-1250-2DCDFC735C14}"/>
+            </a:ext>
+          </a:extLst>
+        </p:cNvPr>
+        <p:cNvGrpSpPr/>
+        <p:nvPr/>
+      </p:nvGrpSpPr>
+      <p:grpSpPr>
+        <a:xfrm>
+          <a:off x="0" y="0"/>
+          <a:ext cx="0" cy="0"/>
+          <a:chOff x="0" y="0"/>
+          <a:chExt cx="0" cy="0"/>
+        </a:xfrm>
+      </p:grpSpPr>
+      <p:sp>
+        <p:nvSpPr>
+          <p:cNvPr id="3" name="Content Placeholder 2">
+            <a:extLst>
+              <a:ext uri="{FF2B5EF4-FFF2-40B4-BE49-F238E27FC236}">
+                <a16:creationId xmlns:a16="http://schemas.microsoft.com/office/drawing/2014/main" id="{09E08A81-2D84-22E8-B6B7-DC43D687C6FE}"/>
+              </a:ext>
+            </a:extLst>
+          </p:cNvPr>
+          <p:cNvSpPr>
+            <a:spLocks noGrp="1"/>
+          </p:cNvSpPr>
+          <p:nvPr>
+            <p:ph idx="1"/>
+          </p:nvPr>
+        </p:nvSpPr>
+        <p:spPr>
+          <a:xfrm>
+            <a:off x="777240" y="696686"/>
+            <a:ext cx="10659110" cy="5480277"/>
+          </a:xfrm>
+        </p:spPr>
+        <p:txBody>
+          <a:bodyPr>
+            <a:normAutofit/>
+          </a:bodyPr>
+          <a:lstStyle/>
+          <a:p>
+            <a:pPr>
+              <a:buNone/>
+            </a:pPr>
+            <a:r>
+              <a:rPr lang="en-US" sz="2400" b="1" dirty="0"/>
+              <a:t>2. Backend receives the requests</a:t>
+            </a:r>
+          </a:p>
+          <a:p>
+            <a:r>
+              <a:rPr lang="en-US" sz="2400" dirty="0"/>
+              <a:t>Each request is handled in the </a:t>
+            </a:r>
+            <a:r>
+              <a:rPr lang="en-US" sz="2400" b="1" dirty="0">
+                <a:solidFill>
+                  <a:srgbClr val="C00000"/>
+                </a:solidFill>
+              </a:rPr>
+              <a:t>main thread</a:t>
+            </a:r>
+            <a:r>
+              <a:rPr lang="en-US" sz="2400" dirty="0"/>
+              <a:t>, which is running the </a:t>
+            </a:r>
+            <a:r>
+              <a:rPr lang="en-US" sz="2400" b="1" dirty="0">
+                <a:solidFill>
+                  <a:srgbClr val="C00000"/>
+                </a:solidFill>
+              </a:rPr>
+              <a:t>Event Loop</a:t>
+            </a:r>
+            <a:r>
+              <a:rPr lang="en-US" sz="2400" dirty="0"/>
+              <a:t>.</a:t>
+            </a:r>
+          </a:p>
+          <a:p>
+            <a:pPr marL="0" indent="0">
+              <a:buNone/>
+            </a:pPr>
+            <a:r>
+              <a:rPr lang="en-IN" sz="2400" b="1" dirty="0"/>
+              <a:t>Example:</a:t>
+            </a:r>
+          </a:p>
+          <a:p>
+            <a:pPr marL="0" indent="0">
+              <a:buNone/>
+            </a:pPr>
+            <a:endParaRPr lang="en-IN" sz="2400" b="1" dirty="0"/>
+          </a:p>
+        </p:txBody>
+      </p:sp>
+      <p:pic>
+        <p:nvPicPr>
+          <p:cNvPr id="4" name="Picture 3">
+            <a:extLst>
+              <a:ext uri="{FF2B5EF4-FFF2-40B4-BE49-F238E27FC236}">
+                <a16:creationId xmlns:a16="http://schemas.microsoft.com/office/drawing/2014/main" id="{4FF4C4FA-AAE7-E229-24DF-3E345DD1E7A3}"/>
+              </a:ext>
+            </a:extLst>
+          </p:cNvPr>
+          <p:cNvPicPr>
+            <a:picLocks noChangeAspect="1"/>
+          </p:cNvPicPr>
+          <p:nvPr/>
+        </p:nvPicPr>
+        <p:blipFill>
+          <a:blip r:embed="rId2"/>
+          <a:stretch>
+            <a:fillRect/>
+          </a:stretch>
+        </p:blipFill>
+        <p:spPr>
+          <a:xfrm>
+            <a:off x="918439" y="2385523"/>
+            <a:ext cx="10180952" cy="3066667"/>
+          </a:xfrm>
+          <a:prstGeom prst="rect">
+            <a:avLst/>
+          </a:prstGeom>
+        </p:spPr>
+      </p:pic>
+    </p:spTree>
+    <p:extLst>
+      <p:ext uri="{BB962C8B-B14F-4D97-AF65-F5344CB8AC3E}">
+        <p14:creationId xmlns:p14="http://schemas.microsoft.com/office/powerpoint/2010/main" val="1197408662"/>
+      </p:ext>
+    </p:extLst>
+  </p:cSld>
+  <p:clrMapOvr>
+    <a:masterClrMapping/>
+  </p:clrMapOvr>
+</p:sld>
+</file>
+
+<file path=ppt/slides/slide41.xml><?xml version="1.0" encoding="utf-8"?>
 <p:sld xmlns:a="http://schemas.openxmlformats.org/drawingml/2006/main" xmlns:r="http://schemas.openxmlformats.org/officeDocument/2006/relationships" xmlns:p="http://schemas.openxmlformats.org/presentationml/2006/main">
   <p:cSld>
     <p:spTree>
@@ -19843,7 +19894,7 @@
 </p:sld>
 </file>
 
-<file path=ppt/slides/slide41.xml><?xml version="1.0" encoding="utf-8"?>
+<file path=ppt/slides/slide42.xml><?xml version="1.0" encoding="utf-8"?>
 <p:sld xmlns:a="http://schemas.openxmlformats.org/drawingml/2006/main" xmlns:r="http://schemas.openxmlformats.org/officeDocument/2006/relationships" xmlns:p="http://schemas.openxmlformats.org/presentationml/2006/main">
   <p:cSld>
     <p:spTree>
@@ -20023,7 +20074,7 @@
 </p:sld>
 </file>
 
-<file path=ppt/slides/slide42.xml><?xml version="1.0" encoding="utf-8"?>
+<file path=ppt/slides/slide43.xml><?xml version="1.0" encoding="utf-8"?>
 <p:sld xmlns:a="http://schemas.openxmlformats.org/drawingml/2006/main" xmlns:r="http://schemas.openxmlformats.org/officeDocument/2006/relationships" xmlns:p="http://schemas.openxmlformats.org/presentationml/2006/main">
   <p:cSld>
     <p:spTree>
@@ -20178,7 +20229,7 @@
 </p:sld>
 </file>
 
-<file path=ppt/slides/slide43.xml><?xml version="1.0" encoding="utf-8"?>
+<file path=ppt/slides/slide44.xml><?xml version="1.0" encoding="utf-8"?>
 <p:sld xmlns:a="http://schemas.openxmlformats.org/drawingml/2006/main" xmlns:r="http://schemas.openxmlformats.org/officeDocument/2006/relationships" xmlns:p="http://schemas.openxmlformats.org/presentationml/2006/main">
   <p:cSld>
     <p:bg>
@@ -20977,7 +21028,7 @@
 </p:sld>
 </file>
 
-<file path=ppt/slides/slide44.xml><?xml version="1.0" encoding="utf-8"?>
+<file path=ppt/slides/slide45.xml><?xml version="1.0" encoding="utf-8"?>
 <p:sld xmlns:a="http://schemas.openxmlformats.org/drawingml/2006/main" xmlns:r="http://schemas.openxmlformats.org/officeDocument/2006/relationships" xmlns:p="http://schemas.openxmlformats.org/presentationml/2006/main">
   <p:cSld>
     <p:spTree>
@@ -21057,7 +21108,7 @@
 </p:sld>
 </file>
 
-<file path=ppt/slides/slide45.xml><?xml version="1.0" encoding="utf-8"?>
+<file path=ppt/slides/slide46.xml><?xml version="1.0" encoding="utf-8"?>
 <p:sld xmlns:a="http://schemas.openxmlformats.org/drawingml/2006/main" xmlns:r="http://schemas.openxmlformats.org/officeDocument/2006/relationships" xmlns:p="http://schemas.openxmlformats.org/presentationml/2006/main">
   <p:cSld>
     <p:bg>
@@ -23220,7 +23271,7 @@
 </p:sld>
 </file>
 
-<file path=ppt/slides/slide46.xml><?xml version="1.0" encoding="utf-8"?>
+<file path=ppt/slides/slide47.xml><?xml version="1.0" encoding="utf-8"?>
 <p:sld xmlns:a="http://schemas.openxmlformats.org/drawingml/2006/main" xmlns:r="http://schemas.openxmlformats.org/officeDocument/2006/relationships" xmlns:p="http://schemas.openxmlformats.org/presentationml/2006/main">
   <p:cSld>
     <p:spTree>
@@ -23486,7 +23537,7 @@
 </p:sld>
 </file>
 
-<file path=ppt/slides/slide47.xml><?xml version="1.0" encoding="utf-8"?>
+<file path=ppt/slides/slide48.xml><?xml version="1.0" encoding="utf-8"?>
 <p:sld xmlns:a="http://schemas.openxmlformats.org/drawingml/2006/main" xmlns:r="http://schemas.openxmlformats.org/officeDocument/2006/relationships" xmlns:p="http://schemas.openxmlformats.org/presentationml/2006/main">
   <p:cSld>
     <p:spTree>
@@ -23770,7 +23821,7 @@
 </p:sld>
 </file>
 
-<file path=ppt/slides/slide48.xml><?xml version="1.0" encoding="utf-8"?>
+<file path=ppt/slides/slide49.xml><?xml version="1.0" encoding="utf-8"?>
 <p:sld xmlns:a="http://schemas.openxmlformats.org/drawingml/2006/main" xmlns:r="http://schemas.openxmlformats.org/officeDocument/2006/relationships" xmlns:p="http://schemas.openxmlformats.org/presentationml/2006/main">
   <p:cSld>
     <p:spTree>
@@ -24099,213 +24150,6 @@
     <p:extLst>
       <p:ext uri="{BB962C8B-B14F-4D97-AF65-F5344CB8AC3E}">
         <p14:creationId xmlns:p14="http://schemas.microsoft.com/office/powerpoint/2010/main" val="2224253486"/>
-      </p:ext>
-    </p:extLst>
-  </p:cSld>
-  <p:clrMapOvr>
-    <a:masterClrMapping/>
-  </p:clrMapOvr>
-</p:sld>
-</file>
-
-<file path=ppt/slides/slide49.xml><?xml version="1.0" encoding="utf-8"?>
-<p:sld xmlns:a="http://schemas.openxmlformats.org/drawingml/2006/main" xmlns:r="http://schemas.openxmlformats.org/officeDocument/2006/relationships" xmlns:p="http://schemas.openxmlformats.org/presentationml/2006/main">
-  <p:cSld>
-    <p:spTree>
-      <p:nvGrpSpPr>
-        <p:cNvPr id="1" name="">
-          <a:extLst>
-            <a:ext uri="{FF2B5EF4-FFF2-40B4-BE49-F238E27FC236}">
-              <a16:creationId xmlns:a16="http://schemas.microsoft.com/office/drawing/2014/main" id="{6974EBDE-972A-3D44-8654-B42D654A9551}"/>
-            </a:ext>
-          </a:extLst>
-        </p:cNvPr>
-        <p:cNvGrpSpPr/>
-        <p:nvPr/>
-      </p:nvGrpSpPr>
-      <p:grpSpPr>
-        <a:xfrm>
-          <a:off x="0" y="0"/>
-          <a:ext cx="0" cy="0"/>
-          <a:chOff x="0" y="0"/>
-          <a:chExt cx="0" cy="0"/>
-        </a:xfrm>
-      </p:grpSpPr>
-      <p:sp>
-        <p:nvSpPr>
-          <p:cNvPr id="3" name="Content Placeholder 2">
-            <a:extLst>
-              <a:ext uri="{FF2B5EF4-FFF2-40B4-BE49-F238E27FC236}">
-                <a16:creationId xmlns:a16="http://schemas.microsoft.com/office/drawing/2014/main" id="{BC7C960D-871D-0A15-0F92-6723BFE0668F}"/>
-              </a:ext>
-            </a:extLst>
-          </p:cNvPr>
-          <p:cNvSpPr>
-            <a:spLocks noGrp="1"/>
-          </p:cNvSpPr>
-          <p:nvPr>
-            <p:ph idx="1"/>
-          </p:nvPr>
-        </p:nvSpPr>
-        <p:spPr>
-          <a:xfrm>
-            <a:off x="777240" y="1001486"/>
-            <a:ext cx="10659110" cy="5175477"/>
-          </a:xfrm>
-        </p:spPr>
-        <p:txBody>
-          <a:bodyPr>
-            <a:normAutofit/>
-          </a:bodyPr>
-          <a:lstStyle/>
-          <a:p>
-            <a:pPr marL="0" marR="0">
-              <a:buNone/>
-            </a:pPr>
-            <a:r>
-              <a:rPr lang="en-IN" sz="2800" b="1" dirty="0">
-                <a:effectLst/>
-                <a:latin typeface="Calibri" panose="020F0502020204030204" pitchFamily="34" charset="0"/>
-              </a:rPr>
-              <a:t>Final Analogy</a:t>
-            </a:r>
-            <a:endParaRPr lang="en-IN" sz="2800" dirty="0">
-              <a:effectLst/>
-              <a:latin typeface="Calibri" panose="020F0502020204030204" pitchFamily="34" charset="0"/>
-            </a:endParaRPr>
-          </a:p>
-          <a:p>
-            <a:pPr rtl="0" fontAlgn="ctr">
-              <a:buFont typeface="Arial" panose="020B0604020202020204" pitchFamily="34" charset="0"/>
-              <a:buChar char="•"/>
-            </a:pPr>
-            <a:r>
-              <a:rPr lang="en-IN" sz="2400" b="1" dirty="0">
-                <a:effectLst/>
-                <a:latin typeface="Calibri" panose="020F0502020204030204" pitchFamily="34" charset="0"/>
-              </a:rPr>
-              <a:t>Your PC </a:t>
-            </a:r>
-            <a:r>
-              <a:rPr lang="en-IN" sz="2400" dirty="0">
-                <a:effectLst/>
-                <a:latin typeface="Calibri" panose="020F0502020204030204" pitchFamily="34" charset="0"/>
-              </a:rPr>
-              <a:t>= Apartment building</a:t>
-            </a:r>
-          </a:p>
-          <a:p>
-            <a:pPr rtl="0" fontAlgn="ctr">
-              <a:buFont typeface="Arial" panose="020B0604020202020204" pitchFamily="34" charset="0"/>
-              <a:buChar char="•"/>
-            </a:pPr>
-            <a:r>
-              <a:rPr lang="en-IN" sz="2400" b="1" dirty="0">
-                <a:effectLst/>
-                <a:latin typeface="Calibri" panose="020F0502020204030204" pitchFamily="34" charset="0"/>
-              </a:rPr>
-              <a:t>IP address </a:t>
-            </a:r>
-            <a:r>
-              <a:rPr lang="en-IN" sz="2400" dirty="0">
-                <a:effectLst/>
-                <a:latin typeface="Calibri" panose="020F0502020204030204" pitchFamily="34" charset="0"/>
-              </a:rPr>
-              <a:t>= Building address</a:t>
-            </a:r>
-          </a:p>
-          <a:p>
-            <a:pPr rtl="0" fontAlgn="ctr">
-              <a:buFont typeface="Arial" panose="020B0604020202020204" pitchFamily="34" charset="0"/>
-              <a:buChar char="•"/>
-            </a:pPr>
-            <a:r>
-              <a:rPr lang="en-IN" sz="2400" b="1" dirty="0">
-                <a:effectLst/>
-                <a:latin typeface="Calibri" panose="020F0502020204030204" pitchFamily="34" charset="0"/>
-              </a:rPr>
-              <a:t>Ports</a:t>
-            </a:r>
-            <a:r>
-              <a:rPr lang="en-IN" sz="2400" dirty="0">
-                <a:effectLst/>
-                <a:latin typeface="Calibri" panose="020F0502020204030204" pitchFamily="34" charset="0"/>
-              </a:rPr>
-              <a:t> = Apartment/room numbers</a:t>
-            </a:r>
-          </a:p>
-          <a:p>
-            <a:pPr rtl="0" fontAlgn="ctr">
-              <a:buFont typeface="Arial" panose="020B0604020202020204" pitchFamily="34" charset="0"/>
-              <a:buChar char="•"/>
-            </a:pPr>
-            <a:r>
-              <a:rPr lang="en-IN" sz="2400" b="1" dirty="0">
-                <a:effectLst/>
-                <a:latin typeface="Calibri" panose="020F0502020204030204" pitchFamily="34" charset="0"/>
-              </a:rPr>
-              <a:t>Servers</a:t>
-            </a:r>
-            <a:r>
-              <a:rPr lang="en-IN" sz="2400" dirty="0">
-                <a:effectLst/>
-                <a:latin typeface="Calibri" panose="020F0502020204030204" pitchFamily="34" charset="0"/>
-              </a:rPr>
-              <a:t> = People living inside</a:t>
-            </a:r>
-          </a:p>
-          <a:p>
-            <a:pPr marL="0" marR="0" indent="0">
-              <a:buNone/>
-            </a:pPr>
-            <a:r>
-              <a:rPr lang="en-IN" sz="2400" dirty="0">
-                <a:effectLst/>
-                <a:latin typeface="Calibri" panose="020F0502020204030204" pitchFamily="34" charset="0"/>
-              </a:rPr>
-              <a:t>All residents live in the same building, but to reach a </a:t>
-            </a:r>
-            <a:r>
-              <a:rPr lang="en-US" sz="2400" b="1" dirty="0">
-                <a:effectLst/>
-                <a:latin typeface="Calibri" panose="020F0502020204030204" pitchFamily="34" charset="0"/>
-              </a:rPr>
-              <a:t>specific one</a:t>
-            </a:r>
-            <a:r>
-              <a:rPr lang="en-IN" sz="2400" dirty="0">
-                <a:effectLst/>
-                <a:latin typeface="Calibri" panose="020F0502020204030204" pitchFamily="34" charset="0"/>
-              </a:rPr>
-              <a:t>, you need the correct </a:t>
-            </a:r>
-            <a:r>
-              <a:rPr lang="en-US" sz="2400" b="1" dirty="0">
-                <a:effectLst/>
-                <a:latin typeface="Calibri" panose="020F0502020204030204" pitchFamily="34" charset="0"/>
-              </a:rPr>
-              <a:t>room (port) number</a:t>
-            </a:r>
-            <a:r>
-              <a:rPr lang="en-IN" sz="2400" dirty="0">
-                <a:effectLst/>
-                <a:latin typeface="Calibri" panose="020F0502020204030204" pitchFamily="34" charset="0"/>
-              </a:rPr>
-              <a:t>.</a:t>
-            </a:r>
-          </a:p>
-          <a:p>
-            <a:pPr marL="0" indent="0">
-              <a:buNone/>
-            </a:pPr>
-            <a:endParaRPr lang="en-IN" sz="2400" dirty="0"/>
-          </a:p>
-        </p:txBody>
-      </p:sp>
-    </p:spTree>
-    <p:extLst>
-      <p:ext uri="{BB962C8B-B14F-4D97-AF65-F5344CB8AC3E}">
-        <p14:creationId xmlns:p14="http://schemas.microsoft.com/office/powerpoint/2010/main" val="3986850537"/>
       </p:ext>
     </p:extLst>
   </p:cSld>
@@ -24651,6 +24495,213 @@
 </file>
 
 <file path=ppt/slides/slide50.xml><?xml version="1.0" encoding="utf-8"?>
+<p:sld xmlns:a="http://schemas.openxmlformats.org/drawingml/2006/main" xmlns:r="http://schemas.openxmlformats.org/officeDocument/2006/relationships" xmlns:p="http://schemas.openxmlformats.org/presentationml/2006/main">
+  <p:cSld>
+    <p:spTree>
+      <p:nvGrpSpPr>
+        <p:cNvPr id="1" name="">
+          <a:extLst>
+            <a:ext uri="{FF2B5EF4-FFF2-40B4-BE49-F238E27FC236}">
+              <a16:creationId xmlns:a16="http://schemas.microsoft.com/office/drawing/2014/main" id="{6974EBDE-972A-3D44-8654-B42D654A9551}"/>
+            </a:ext>
+          </a:extLst>
+        </p:cNvPr>
+        <p:cNvGrpSpPr/>
+        <p:nvPr/>
+      </p:nvGrpSpPr>
+      <p:grpSpPr>
+        <a:xfrm>
+          <a:off x="0" y="0"/>
+          <a:ext cx="0" cy="0"/>
+          <a:chOff x="0" y="0"/>
+          <a:chExt cx="0" cy="0"/>
+        </a:xfrm>
+      </p:grpSpPr>
+      <p:sp>
+        <p:nvSpPr>
+          <p:cNvPr id="3" name="Content Placeholder 2">
+            <a:extLst>
+              <a:ext uri="{FF2B5EF4-FFF2-40B4-BE49-F238E27FC236}">
+                <a16:creationId xmlns:a16="http://schemas.microsoft.com/office/drawing/2014/main" id="{BC7C960D-871D-0A15-0F92-6723BFE0668F}"/>
+              </a:ext>
+            </a:extLst>
+          </p:cNvPr>
+          <p:cNvSpPr>
+            <a:spLocks noGrp="1"/>
+          </p:cNvSpPr>
+          <p:nvPr>
+            <p:ph idx="1"/>
+          </p:nvPr>
+        </p:nvSpPr>
+        <p:spPr>
+          <a:xfrm>
+            <a:off x="777240" y="1001486"/>
+            <a:ext cx="10659110" cy="5175477"/>
+          </a:xfrm>
+        </p:spPr>
+        <p:txBody>
+          <a:bodyPr>
+            <a:normAutofit/>
+          </a:bodyPr>
+          <a:lstStyle/>
+          <a:p>
+            <a:pPr marL="0" marR="0">
+              <a:buNone/>
+            </a:pPr>
+            <a:r>
+              <a:rPr lang="en-IN" sz="2800" b="1" dirty="0">
+                <a:effectLst/>
+                <a:latin typeface="Calibri" panose="020F0502020204030204" pitchFamily="34" charset="0"/>
+              </a:rPr>
+              <a:t>Final Analogy</a:t>
+            </a:r>
+            <a:endParaRPr lang="en-IN" sz="2800" dirty="0">
+              <a:effectLst/>
+              <a:latin typeface="Calibri" panose="020F0502020204030204" pitchFamily="34" charset="0"/>
+            </a:endParaRPr>
+          </a:p>
+          <a:p>
+            <a:pPr rtl="0" fontAlgn="ctr">
+              <a:buFont typeface="Arial" panose="020B0604020202020204" pitchFamily="34" charset="0"/>
+              <a:buChar char="•"/>
+            </a:pPr>
+            <a:r>
+              <a:rPr lang="en-IN" sz="2400" b="1" dirty="0">
+                <a:effectLst/>
+                <a:latin typeface="Calibri" panose="020F0502020204030204" pitchFamily="34" charset="0"/>
+              </a:rPr>
+              <a:t>Your PC </a:t>
+            </a:r>
+            <a:r>
+              <a:rPr lang="en-IN" sz="2400" dirty="0">
+                <a:effectLst/>
+                <a:latin typeface="Calibri" panose="020F0502020204030204" pitchFamily="34" charset="0"/>
+              </a:rPr>
+              <a:t>= Apartment building</a:t>
+            </a:r>
+          </a:p>
+          <a:p>
+            <a:pPr rtl="0" fontAlgn="ctr">
+              <a:buFont typeface="Arial" panose="020B0604020202020204" pitchFamily="34" charset="0"/>
+              <a:buChar char="•"/>
+            </a:pPr>
+            <a:r>
+              <a:rPr lang="en-IN" sz="2400" b="1" dirty="0">
+                <a:effectLst/>
+                <a:latin typeface="Calibri" panose="020F0502020204030204" pitchFamily="34" charset="0"/>
+              </a:rPr>
+              <a:t>IP address </a:t>
+            </a:r>
+            <a:r>
+              <a:rPr lang="en-IN" sz="2400" dirty="0">
+                <a:effectLst/>
+                <a:latin typeface="Calibri" panose="020F0502020204030204" pitchFamily="34" charset="0"/>
+              </a:rPr>
+              <a:t>= Building address</a:t>
+            </a:r>
+          </a:p>
+          <a:p>
+            <a:pPr rtl="0" fontAlgn="ctr">
+              <a:buFont typeface="Arial" panose="020B0604020202020204" pitchFamily="34" charset="0"/>
+              <a:buChar char="•"/>
+            </a:pPr>
+            <a:r>
+              <a:rPr lang="en-IN" sz="2400" b="1" dirty="0">
+                <a:effectLst/>
+                <a:latin typeface="Calibri" panose="020F0502020204030204" pitchFamily="34" charset="0"/>
+              </a:rPr>
+              <a:t>Ports</a:t>
+            </a:r>
+            <a:r>
+              <a:rPr lang="en-IN" sz="2400" dirty="0">
+                <a:effectLst/>
+                <a:latin typeface="Calibri" panose="020F0502020204030204" pitchFamily="34" charset="0"/>
+              </a:rPr>
+              <a:t> = Apartment/room numbers</a:t>
+            </a:r>
+          </a:p>
+          <a:p>
+            <a:pPr rtl="0" fontAlgn="ctr">
+              <a:buFont typeface="Arial" panose="020B0604020202020204" pitchFamily="34" charset="0"/>
+              <a:buChar char="•"/>
+            </a:pPr>
+            <a:r>
+              <a:rPr lang="en-IN" sz="2400" b="1" dirty="0">
+                <a:effectLst/>
+                <a:latin typeface="Calibri" panose="020F0502020204030204" pitchFamily="34" charset="0"/>
+              </a:rPr>
+              <a:t>Servers</a:t>
+            </a:r>
+            <a:r>
+              <a:rPr lang="en-IN" sz="2400" dirty="0">
+                <a:effectLst/>
+                <a:latin typeface="Calibri" panose="020F0502020204030204" pitchFamily="34" charset="0"/>
+              </a:rPr>
+              <a:t> = People living inside</a:t>
+            </a:r>
+          </a:p>
+          <a:p>
+            <a:pPr marL="0" marR="0" indent="0">
+              <a:buNone/>
+            </a:pPr>
+            <a:r>
+              <a:rPr lang="en-IN" sz="2400" dirty="0">
+                <a:effectLst/>
+                <a:latin typeface="Calibri" panose="020F0502020204030204" pitchFamily="34" charset="0"/>
+              </a:rPr>
+              <a:t>All residents live in the same building, but to reach a </a:t>
+            </a:r>
+            <a:r>
+              <a:rPr lang="en-US" sz="2400" b="1" dirty="0">
+                <a:effectLst/>
+                <a:latin typeface="Calibri" panose="020F0502020204030204" pitchFamily="34" charset="0"/>
+              </a:rPr>
+              <a:t>specific one</a:t>
+            </a:r>
+            <a:r>
+              <a:rPr lang="en-IN" sz="2400" dirty="0">
+                <a:effectLst/>
+                <a:latin typeface="Calibri" panose="020F0502020204030204" pitchFamily="34" charset="0"/>
+              </a:rPr>
+              <a:t>, you need the correct </a:t>
+            </a:r>
+            <a:r>
+              <a:rPr lang="en-US" sz="2400" b="1" dirty="0">
+                <a:effectLst/>
+                <a:latin typeface="Calibri" panose="020F0502020204030204" pitchFamily="34" charset="0"/>
+              </a:rPr>
+              <a:t>room (port) number</a:t>
+            </a:r>
+            <a:r>
+              <a:rPr lang="en-IN" sz="2400" dirty="0">
+                <a:effectLst/>
+                <a:latin typeface="Calibri" panose="020F0502020204030204" pitchFamily="34" charset="0"/>
+              </a:rPr>
+              <a:t>.</a:t>
+            </a:r>
+          </a:p>
+          <a:p>
+            <a:pPr marL="0" indent="0">
+              <a:buNone/>
+            </a:pPr>
+            <a:endParaRPr lang="en-IN" sz="2400" dirty="0"/>
+          </a:p>
+        </p:txBody>
+      </p:sp>
+    </p:spTree>
+    <p:extLst>
+      <p:ext uri="{BB962C8B-B14F-4D97-AF65-F5344CB8AC3E}">
+        <p14:creationId xmlns:p14="http://schemas.microsoft.com/office/powerpoint/2010/main" val="3986850537"/>
+      </p:ext>
+    </p:extLst>
+  </p:cSld>
+  <p:clrMapOvr>
+    <a:masterClrMapping/>
+  </p:clrMapOvr>
+</p:sld>
+</file>
+
+<file path=ppt/slides/slide51.xml><?xml version="1.0" encoding="utf-8"?>
 <p:sld xmlns:a="http://schemas.openxmlformats.org/drawingml/2006/main" xmlns:r="http://schemas.openxmlformats.org/officeDocument/2006/relationships" xmlns:p="http://schemas.openxmlformats.org/presentationml/2006/main">
   <p:cSld>
     <p:spTree>
@@ -24791,7 +24842,7 @@
 </p:sld>
 </file>
 
-<file path=ppt/slides/slide51.xml><?xml version="1.0" encoding="utf-8"?>
+<file path=ppt/slides/slide52.xml><?xml version="1.0" encoding="utf-8"?>
 <p:sld xmlns:a="http://schemas.openxmlformats.org/drawingml/2006/main" xmlns:r="http://schemas.openxmlformats.org/officeDocument/2006/relationships" xmlns:p="http://schemas.openxmlformats.org/presentationml/2006/main">
   <p:cSld>
     <p:spTree>
@@ -24956,7 +25007,7 @@
 </p:sld>
 </file>
 
-<file path=ppt/slides/slide52.xml><?xml version="1.0" encoding="utf-8"?>
+<file path=ppt/slides/slide53.xml><?xml version="1.0" encoding="utf-8"?>
 <p:sld xmlns:a="http://schemas.openxmlformats.org/drawingml/2006/main" xmlns:r="http://schemas.openxmlformats.org/officeDocument/2006/relationships" xmlns:p="http://schemas.openxmlformats.org/presentationml/2006/main">
   <p:cSld>
     <p:spTree>
@@ -25782,7 +25833,7 @@
 </p:sld>
 </file>
 
-<file path=ppt/slides/slide53.xml><?xml version="1.0" encoding="utf-8"?>
+<file path=ppt/slides/slide54.xml><?xml version="1.0" encoding="utf-8"?>
 <p:sld xmlns:a="http://schemas.openxmlformats.org/drawingml/2006/main" xmlns:r="http://schemas.openxmlformats.org/officeDocument/2006/relationships" xmlns:p="http://schemas.openxmlformats.org/presentationml/2006/main">
   <p:cSld>
     <p:spTree>
@@ -25960,7 +26011,7 @@
 </p:sld>
 </file>
 
-<file path=ppt/slides/slide54.xml><?xml version="1.0" encoding="utf-8"?>
+<file path=ppt/slides/slide55.xml><?xml version="1.0" encoding="utf-8"?>
 <p:sld xmlns:a="http://schemas.openxmlformats.org/drawingml/2006/main" xmlns:r="http://schemas.openxmlformats.org/officeDocument/2006/relationships" xmlns:p="http://schemas.openxmlformats.org/presentationml/2006/main">
   <p:cSld>
     <p:spTree>
@@ -26101,7 +26152,7 @@
 </p:sld>
 </file>
 
-<file path=ppt/slides/slide55.xml><?xml version="1.0" encoding="utf-8"?>
+<file path=ppt/slides/slide56.xml><?xml version="1.0" encoding="utf-8"?>
 <p:sld xmlns:a="http://schemas.openxmlformats.org/drawingml/2006/main" xmlns:r="http://schemas.openxmlformats.org/officeDocument/2006/relationships" xmlns:p="http://schemas.openxmlformats.org/presentationml/2006/main">
   <p:cSld>
     <p:spTree>
@@ -26505,7 +26556,7 @@
 </p:sld>
 </file>
 
-<file path=ppt/slides/slide56.xml><?xml version="1.0" encoding="utf-8"?>
+<file path=ppt/slides/slide57.xml><?xml version="1.0" encoding="utf-8"?>
 <p:sld xmlns:a="http://schemas.openxmlformats.org/drawingml/2006/main" xmlns:r="http://schemas.openxmlformats.org/officeDocument/2006/relationships" xmlns:p="http://schemas.openxmlformats.org/presentationml/2006/main">
   <p:cSld>
     <p:spTree>
@@ -26695,7 +26746,7 @@
 </p:sld>
 </file>
 
-<file path=ppt/slides/slide57.xml><?xml version="1.0" encoding="utf-8"?>
+<file path=ppt/slides/slide58.xml><?xml version="1.0" encoding="utf-8"?>
 <p:sld xmlns:a="http://schemas.openxmlformats.org/drawingml/2006/main" xmlns:r="http://schemas.openxmlformats.org/officeDocument/2006/relationships" xmlns:p="http://schemas.openxmlformats.org/presentationml/2006/main">
   <p:cSld>
     <p:spTree>
@@ -27028,7 +27079,7 @@
 </p:sld>
 </file>
 
-<file path=ppt/slides/slide58.xml><?xml version="1.0" encoding="utf-8"?>
+<file path=ppt/slides/slide59.xml><?xml version="1.0" encoding="utf-8"?>
 <p:sld xmlns:a="http://schemas.openxmlformats.org/drawingml/2006/main" xmlns:r="http://schemas.openxmlformats.org/officeDocument/2006/relationships" xmlns:p="http://schemas.openxmlformats.org/presentationml/2006/main">
   <p:cSld>
     <p:spTree>
